--- a/public/fun/pack/pptx/weddingpro/결혼식프리미엄_09_오시는길중심_로제브론즈.pptx
+++ b/public/fun/pack/pptx/weddingpro/결혼식프리미엄_09_오시는길중심_로제브론즈.pptx
@@ -113,12 +113,12 @@
   <p:extLst>
     <p:ext uri="{521415D9-36F7-43E2-AB2F-B90AF26B5E84}">
       <p14:sectionLst xmlns:p14="http://schemas.microsoft.com/office/powerpoint/2010/main">
-        <p14:section name="시작" id="{969BBCCB-06CD-4AB6-BE6F-9E08A210E3AE}">
+        <p14:section name="시작" id="{A118D2E8-E7EC-4B99-9901-DD63CD01ADCA}">
           <p14:sldIdLst>
             <p14:sldId id="256"/>
           </p14:sldIdLst>
         </p14:section>
-        <p14:section name="본문" id="{02F5940F-440A-47D3-8A8A-685BE3877E59}">
+        <p14:section name="본문" id="{0B912398-7B09-4582-9C69-912C2933B484}">
           <p14:sldIdLst>
             <p14:sldId id="257"/>
             <p14:sldId id="258"/>
@@ -127,7 +127,7 @@
             <p14:sldId id="261"/>
           </p14:sldIdLst>
         </p14:section>
-        <p14:section name="마무리" id="{6634E1B4-9D9C-42B8-8549-92771C93221D}">
+        <p14:section name="마무리" id="{792DE1DF-7437-41D8-8001-03A27EC5FD0F}">
           <p14:sldIdLst>
             <p14:sldId id="262"/>
           </p14:sldIdLst>
@@ -1664,7 +1664,7 @@
             </a:lvl1pPr>
           </a:lstStyle>
           <a:p>
-            <a:fld id="{8C2FF0D8-A7F8-4DC9-B0E5-BB6CA42B2147}" type="slidenum">
+            <a:fld id="{B14C8B3D-2125-45AA-AFB6-BD15D6DB70DE}" type="slidenum">
               <a:rPr lang="en-US"/>
               <a:t>‹#›</a:t>
             </a:fld>
@@ -2790,7 +2790,7 @@
             </a:lvl1pPr>
           </a:lstStyle>
           <a:p>
-            <a:fld id="{CF82CE2F-8008-4235-A78B-B1218C0191A6}" type="slidenum">
+            <a:fld id="{52621FA6-DB42-4BB7-845F-A79FA89EF183}" type="slidenum">
               <a:rPr lang="en-US"/>
               <a:t>‹#›</a:t>
             </a:fld>
@@ -3800,7 +3800,7 @@
             </a:lvl1pPr>
           </a:lstStyle>
           <a:p>
-            <a:fld id="{6DBCEA60-3BA6-42D2-86A8-FAE533C96FC1}" type="slidenum">
+            <a:fld id="{D2FD4499-6B5A-4928-86C5-D29310EC4562}" type="slidenum">
               <a:rPr lang="en-US"/>
               <a:t>‹#›</a:t>
             </a:fld>
@@ -4969,7 +4969,7 @@
           <a:p>
             <a:r>
               <a:rPr lang="ko-KR"/>
-              <a:t>0000. 00. 00 · 예식장 이름</a:t>
+              <a:t>날짜 입력 · 예식장 이름</a:t>
             </a:r>
           </a:p>
         </p:txBody>
@@ -5192,7 +5192,7 @@
           <a:bodyPr/>
           <a:lstStyle/>
           <a:p>
-            <a:fld id="{E79C5173-C468-492D-B612-649FA19489C8}" type="slidenum">
+            <a:fld id="{1FDF852A-E087-4237-B0AE-950641354CC8}" type="slidenum">
               <a:rPr lang="en-US"/>
               <a:t>‹#›</a:t>
             </a:fld>
@@ -5670,7 +5670,7 @@
           <a:bodyPr/>
           <a:lstStyle/>
           <a:p>
-            <a:fld id="{71B5CD17-7463-4532-BF63-9C0C0E6440AC}" type="slidenum">
+            <a:fld id="{9EA47C9F-806D-490D-BE00-69DA4EF93666}" type="slidenum">
               <a:rPr lang="en-US"/>
               <a:t>‹#›</a:t>
             </a:fld>
@@ -6108,7 +6108,7 @@
           <a:bodyPr/>
           <a:lstStyle/>
           <a:p>
-            <a:fld id="{9699461D-3F8C-4590-8382-BFC65A7F471A}" type="slidenum">
+            <a:fld id="{2B2814AE-7AF9-487A-B00E-97B5BE3A24F0}" type="slidenum">
               <a:rPr lang="en-US"/>
               <a:t>‹#›</a:t>
             </a:fld>
@@ -7393,7 +7393,7 @@
           <a:bodyPr/>
           <a:lstStyle/>
           <a:p>
-            <a:fld id="{189FC181-218C-48AD-87BC-B0266B9102BD}" type="slidenum">
+            <a:fld id="{323C7186-3153-4747-A63B-1CAFC4E0E0D4}" type="slidenum">
               <a:rPr lang="en-US"/>
               <a:t>‹#›</a:t>
             </a:fld>
@@ -7481,7 +7481,7 @@
           <a:bodyPr/>
           <a:lstStyle/>
           <a:p>
-            <a:fld id="{2C8A8AEB-9CEC-4ADC-ACDA-0E0E703D34CF}" type="slidenum">
+            <a:fld id="{5646939F-067E-4E57-98AA-1133F4077632}" type="slidenum">
               <a:rPr lang="en-US"/>
               <a:t>‹#›</a:t>
             </a:fld>
